--- a/Lecture06_Matching/Lecture06_Matching.pptx
+++ b/Lecture06_Matching/Lecture06_Matching.pptx
@@ -11244,7 +11244,7 @@
           <a:p>
             <a:r>
               <a:rPr lang="en-US" sz="2400" dirty="0"/>
-              <a:t>February 23, 2026</a:t>
+              <a:t>October 26, 2026</a:t>
             </a:r>
           </a:p>
           <a:p>

--- a/Lecture06_Matching/Lecture06_Matching.pptx
+++ b/Lecture06_Matching/Lecture06_Matching.pptx
@@ -27684,7 +27684,7 @@
                 </a:solidFill>
                 <a:cs typeface="Times New Roman" panose="02020603050405020304" pitchFamily="18" charset="0"/>
               </a:rPr>
-              <a:t>debaucle</a:t>
+              <a:t>debacle</a:t>
             </a:r>
             <a:endParaRPr lang="en-US" sz="2400" dirty="0">
               <a:solidFill>
